--- a/site/clases/parte-1-machine-learning-clasico/055-feature-engineering-avanzado-target-encoding-mice/clase-055-feature-engineering-avanzado-target-encoding-mice-presentacion.pptx
+++ b/site/clases/parte-1-machine-learning-clasico/055-feature-engineering-avanzado-target-encoding-mice/clase-055-feature-engineering-avanzado-target-encoding-mice-presentacion.pptx
@@ -3272,7 +3272,7 @@
                 </a:solidFill>
                 <a:latin typeface="Segoe UI"/>
               </a:rPr>
-              <a:t>Parte: 1 — Machine Learning Clásico · Fuente: Micci-Barreca (2001) target encoding + Van Buuren (2018) Flexible Imputation of Missing Data.  Duración estimada: 85 min.</a:t>
+              <a:t>Parte: 1 — Machine Learning Clásico · Fuente: Micci-Barreca (2001) target encoding + Van Buuren (2018) Flexible Imputation of Missing Data.  Duración estimada: 85 min. · Nivel: Intermedio</a:t>
             </a:r>
           </a:p>
         </p:txBody>
@@ -3581,7 +3581,7 @@
                 </a:solidFill>
                 <a:latin typeface="Segoe UI"/>
               </a:rPr>
-              <a:t>Parte: 1 — Machine Learning Clásico · Fuente: Micci-Barreca (2001) target encoding + Van Buuren (2018) Flexible Imputation of Missing Data.  Duración estimada: 85 min.</a:t>
+              <a:t>Parte: 1 — Machine Learning Clásico · Fuente: Micci-Barreca (2001) target encoding + Van Buuren (2018) Flexible Imputation of Missing Data.  Duración estimada: 85 min. · Nivel: Intermedio</a:t>
             </a:r>
           </a:p>
         </p:txBody>
